--- a/doc/簡報1.pptx
+++ b/doc/簡報1.pptx
@@ -7,6 +7,7 @@
   <p:sldIdLst>
     <p:sldId id="256" r:id="rId2"/>
     <p:sldId id="257" r:id="rId3"/>
+    <p:sldId id="258" r:id="rId4"/>
   </p:sldIdLst>
   <p:sldSz cx="12192000" cy="6858000"/>
   <p:notesSz cx="6858000" cy="9144000"/>
@@ -105,6 +106,11 @@
       </a:defRPr>
     </a:lvl9pPr>
   </p:defaultTextStyle>
+  <p:extLst>
+    <p:ext uri="{EFAFB233-063F-42B5-8137-9DF3F51BA10A}">
+      <p15:sldGuideLst xmlns:p15="http://schemas.microsoft.com/office/powerpoint/2012/main"/>
+    </p:ext>
+  </p:extLst>
 </p:presentation>
 </file>
 
@@ -5656,7 +5662,7 @@
         </p:blipFill>
         <p:spPr bwMode="auto">
           <a:xfrm>
-            <a:off x="2798982" y="4407025"/>
+            <a:off x="2758118" y="3970904"/>
             <a:ext cx="494533" cy="494533"/>
           </a:xfrm>
           <a:prstGeom prst="rect">
@@ -5828,10 +5834,903 @@
           </a:effectLst>
         </p:spPr>
       </p:pic>
+      <p:pic>
+        <p:nvPicPr>
+          <p:cNvPr id="5" name="圖形 4" descr="標記 以實心填滿">
+            <a:extLst>
+              <a:ext uri="{FF2B5EF4-FFF2-40B4-BE49-F238E27FC236}">
+                <a16:creationId xmlns:a16="http://schemas.microsoft.com/office/drawing/2014/main" id="{C03243A1-9745-4C34-A213-6F29D4D437FB}"/>
+              </a:ext>
+            </a:extLst>
+          </p:cNvPr>
+          <p:cNvPicPr>
+            <a:picLocks noChangeAspect="1"/>
+          </p:cNvPicPr>
+          <p:nvPr/>
+        </p:nvPicPr>
+        <p:blipFill>
+          <a:blip r:embed="rId5">
+            <a:extLst>
+              <a:ext uri="{28A0092B-C50C-407E-A947-70E740481C1C}">
+                <a14:useLocalDpi xmlns:a14="http://schemas.microsoft.com/office/drawing/2010/main" val="0"/>
+              </a:ext>
+              <a:ext uri="{96DAC541-7B7A-43D3-8B79-37D633B846F1}">
+                <asvg:svgBlip xmlns:asvg="http://schemas.microsoft.com/office/drawing/2016/SVG/main" r:embed="rId6"/>
+              </a:ext>
+            </a:extLst>
+          </a:blip>
+          <a:stretch>
+            <a:fillRect/>
+          </a:stretch>
+        </p:blipFill>
+        <p:spPr>
+          <a:xfrm>
+            <a:off x="4859841" y="3823401"/>
+            <a:ext cx="394769" cy="394769"/>
+          </a:xfrm>
+          <a:prstGeom prst="rect">
+            <a:avLst/>
+          </a:prstGeom>
+        </p:spPr>
+      </p:pic>
+      <p:pic>
+        <p:nvPicPr>
+          <p:cNvPr id="26" name="圖形 25" descr="標記 以實心填滿">
+            <a:extLst>
+              <a:ext uri="{FF2B5EF4-FFF2-40B4-BE49-F238E27FC236}">
+                <a16:creationId xmlns:a16="http://schemas.microsoft.com/office/drawing/2014/main" id="{DC419246-9818-46FB-BD4C-54C2088EC2D0}"/>
+              </a:ext>
+            </a:extLst>
+          </p:cNvPr>
+          <p:cNvPicPr>
+            <a:picLocks noChangeAspect="1"/>
+          </p:cNvPicPr>
+          <p:nvPr/>
+        </p:nvPicPr>
+        <p:blipFill>
+          <a:blip r:embed="rId7">
+            <a:extLst>
+              <a:ext uri="{28A0092B-C50C-407E-A947-70E740481C1C}">
+                <a14:useLocalDpi xmlns:a14="http://schemas.microsoft.com/office/drawing/2010/main" val="0"/>
+              </a:ext>
+              <a:ext uri="{96DAC541-7B7A-43D3-8B79-37D633B846F1}">
+                <asvg:svgBlip xmlns:asvg="http://schemas.microsoft.com/office/drawing/2016/SVG/main" r:embed="rId8"/>
+              </a:ext>
+            </a:extLst>
+          </a:blip>
+          <a:stretch>
+            <a:fillRect/>
+          </a:stretch>
+        </p:blipFill>
+        <p:spPr>
+          <a:xfrm>
+            <a:off x="2437261" y="4343388"/>
+            <a:ext cx="641714" cy="641714"/>
+          </a:xfrm>
+          <a:prstGeom prst="rect">
+            <a:avLst/>
+          </a:prstGeom>
+          <a:effectLst>
+            <a:glow rad="114300">
+              <a:schemeClr val="accent4">
+                <a:satMod val="175000"/>
+              </a:schemeClr>
+            </a:glow>
+          </a:effectLst>
+        </p:spPr>
+      </p:pic>
+      <p:pic>
+        <p:nvPicPr>
+          <p:cNvPr id="27" name="圖形 26" descr="標記 以實心填滿">
+            <a:extLst>
+              <a:ext uri="{FF2B5EF4-FFF2-40B4-BE49-F238E27FC236}">
+                <a16:creationId xmlns:a16="http://schemas.microsoft.com/office/drawing/2014/main" id="{F96070DB-58E5-4290-8936-8600182A4811}"/>
+              </a:ext>
+            </a:extLst>
+          </p:cNvPr>
+          <p:cNvPicPr>
+            <a:picLocks noChangeAspect="1"/>
+          </p:cNvPicPr>
+          <p:nvPr/>
+        </p:nvPicPr>
+        <p:blipFill>
+          <a:blip r:embed="rId9">
+            <a:extLst>
+              <a:ext uri="{28A0092B-C50C-407E-A947-70E740481C1C}">
+                <a14:useLocalDpi xmlns:a14="http://schemas.microsoft.com/office/drawing/2010/main" val="0"/>
+              </a:ext>
+              <a:ext uri="{96DAC541-7B7A-43D3-8B79-37D633B846F1}">
+                <asvg:svgBlip xmlns:asvg="http://schemas.microsoft.com/office/drawing/2016/SVG/main" r:embed="rId10"/>
+              </a:ext>
+            </a:extLst>
+          </a:blip>
+          <a:stretch>
+            <a:fillRect/>
+          </a:stretch>
+        </p:blipFill>
+        <p:spPr>
+          <a:xfrm>
+            <a:off x="4533292" y="4050451"/>
+            <a:ext cx="585875" cy="585875"/>
+          </a:xfrm>
+          <a:prstGeom prst="rect">
+            <a:avLst/>
+          </a:prstGeom>
+        </p:spPr>
+      </p:pic>
     </p:spTree>
     <p:extLst>
       <p:ext uri="{BB962C8B-B14F-4D97-AF65-F5344CB8AC3E}">
         <p14:creationId xmlns:p14="http://schemas.microsoft.com/office/powerpoint/2010/main" val="3726844920"/>
+      </p:ext>
+    </p:extLst>
+  </p:cSld>
+  <p:clrMapOvr>
+    <a:masterClrMapping/>
+  </p:clrMapOvr>
+</p:sld>
+</file>
+
+<file path=ppt/slides/slide3.xml><?xml version="1.0" encoding="utf-8"?>
+<p:sld xmlns:a="http://schemas.openxmlformats.org/drawingml/2006/main" xmlns:r="http://schemas.openxmlformats.org/officeDocument/2006/relationships" xmlns:p="http://schemas.openxmlformats.org/presentationml/2006/main">
+  <p:cSld>
+    <p:bg>
+      <p:bgPr>
+        <a:solidFill>
+          <a:schemeClr val="tx1">
+            <a:lumMod val="75000"/>
+            <a:lumOff val="25000"/>
+          </a:schemeClr>
+        </a:solidFill>
+        <a:effectLst/>
+      </p:bgPr>
+    </p:bg>
+    <p:spTree>
+      <p:nvGrpSpPr>
+        <p:cNvPr id="1" name=""/>
+        <p:cNvGrpSpPr/>
+        <p:nvPr/>
+      </p:nvGrpSpPr>
+      <p:grpSpPr>
+        <a:xfrm>
+          <a:off x="0" y="0"/>
+          <a:ext cx="0" cy="0"/>
+          <a:chOff x="0" y="0"/>
+          <a:chExt cx="0" cy="0"/>
+        </a:xfrm>
+      </p:grpSpPr>
+      <p:sp>
+        <p:nvSpPr>
+          <p:cNvPr id="4" name="矩形 3">
+            <a:extLst>
+              <a:ext uri="{FF2B5EF4-FFF2-40B4-BE49-F238E27FC236}">
+                <a16:creationId xmlns:a16="http://schemas.microsoft.com/office/drawing/2014/main" id="{29B4CFCA-3F45-4582-B8F8-8E71CC605D9A}"/>
+              </a:ext>
+            </a:extLst>
+          </p:cNvPr>
+          <p:cNvSpPr/>
+          <p:nvPr/>
+        </p:nvSpPr>
+        <p:spPr>
+          <a:xfrm>
+            <a:off x="2069960" y="180871"/>
+            <a:ext cx="4026040" cy="6330462"/>
+          </a:xfrm>
+          <a:prstGeom prst="rect">
+            <a:avLst/>
+          </a:prstGeom>
+          <a:solidFill>
+            <a:schemeClr val="accent6">
+              <a:lumMod val="40000"/>
+              <a:lumOff val="60000"/>
+            </a:schemeClr>
+          </a:solidFill>
+          <a:ln>
+            <a:solidFill>
+              <a:schemeClr val="bg1"/>
+            </a:solidFill>
+          </a:ln>
+        </p:spPr>
+        <p:style>
+          <a:lnRef idx="2">
+            <a:schemeClr val="accent1">
+              <a:shade val="50000"/>
+            </a:schemeClr>
+          </a:lnRef>
+          <a:fillRef idx="1">
+            <a:schemeClr val="accent1"/>
+          </a:fillRef>
+          <a:effectRef idx="0">
+            <a:schemeClr val="accent1"/>
+          </a:effectRef>
+          <a:fontRef idx="minor">
+            <a:schemeClr val="lt1"/>
+          </a:fontRef>
+        </p:style>
+        <p:txBody>
+          <a:bodyPr rtlCol="0" anchor="ctr"/>
+          <a:lstStyle/>
+          <a:p>
+            <a:endParaRPr lang="zh-TW" altLang="en-US" sz="1600" b="0" dirty="0">
+              <a:solidFill>
+                <a:schemeClr val="tx1"/>
+              </a:solidFill>
+              <a:effectLst/>
+              <a:latin typeface="微軟正黑體" panose="020B0604030504040204" pitchFamily="34" charset="-120"/>
+              <a:ea typeface="微軟正黑體" panose="020B0604030504040204" pitchFamily="34" charset="-120"/>
+            </a:endParaRPr>
+          </a:p>
+        </p:txBody>
+      </p:sp>
+      <p:sp>
+        <p:nvSpPr>
+          <p:cNvPr id="6" name="文字方塊 5">
+            <a:extLst>
+              <a:ext uri="{FF2B5EF4-FFF2-40B4-BE49-F238E27FC236}">
+                <a16:creationId xmlns:a16="http://schemas.microsoft.com/office/drawing/2014/main" id="{2D7C5900-9620-4CF5-9316-113C42D3DD27}"/>
+              </a:ext>
+            </a:extLst>
+          </p:cNvPr>
+          <p:cNvSpPr txBox="1"/>
+          <p:nvPr/>
+        </p:nvSpPr>
+        <p:spPr>
+          <a:xfrm>
+            <a:off x="2532983" y="361682"/>
+            <a:ext cx="3147015" cy="261610"/>
+          </a:xfrm>
+          <a:prstGeom prst="rect">
+            <a:avLst/>
+          </a:prstGeom>
+          <a:noFill/>
+        </p:spPr>
+        <p:txBody>
+          <a:bodyPr wrap="none" rtlCol="0">
+            <a:spAutoFit/>
+          </a:bodyPr>
+          <a:lstStyle/>
+          <a:p>
+            <a:r>
+              <a:rPr lang="zh-TW" altLang="en-US" sz="1100" i="1" dirty="0">
+                <a:latin typeface="微軟正黑體" panose="020B0604030504040204" pitchFamily="34" charset="-120"/>
+                <a:ea typeface="微軟正黑體" panose="020B0604030504040204" pitchFamily="34" charset="-120"/>
+              </a:rPr>
+              <a:t>午安，出門前記得關瓦斯，帶手機、鑰匙和錢包</a:t>
+            </a:r>
+          </a:p>
+        </p:txBody>
+      </p:sp>
+      <p:sp>
+        <p:nvSpPr>
+          <p:cNvPr id="7" name="文字方塊 6">
+            <a:extLst>
+              <a:ext uri="{FF2B5EF4-FFF2-40B4-BE49-F238E27FC236}">
+                <a16:creationId xmlns:a16="http://schemas.microsoft.com/office/drawing/2014/main" id="{99E2DFEC-60BC-44AE-AA82-319A30F17DFD}"/>
+              </a:ext>
+            </a:extLst>
+          </p:cNvPr>
+          <p:cNvSpPr txBox="1"/>
+          <p:nvPr/>
+        </p:nvSpPr>
+        <p:spPr>
+          <a:xfrm>
+            <a:off x="2166258" y="757209"/>
+            <a:ext cx="2627812" cy="261610"/>
+          </a:xfrm>
+          <a:prstGeom prst="rect">
+            <a:avLst/>
+          </a:prstGeom>
+          <a:noFill/>
+        </p:spPr>
+        <p:txBody>
+          <a:bodyPr wrap="square" rtlCol="0">
+            <a:spAutoFit/>
+          </a:bodyPr>
+          <a:lstStyle/>
+          <a:p>
+            <a:r>
+              <a:rPr lang="zh-TW" altLang="en-US" sz="1100" dirty="0">
+                <a:latin typeface="微軟正黑體" panose="020B0604030504040204" pitchFamily="34" charset="-120"/>
+                <a:ea typeface="微軟正黑體" panose="020B0604030504040204" pitchFamily="34" charset="-120"/>
+              </a:rPr>
+              <a:t>資料更新時間：</a:t>
+            </a:r>
+            <a:r>
+              <a:rPr lang="en-US" altLang="zh-TW" sz="1100" b="1" dirty="0">
+                <a:latin typeface="微軟正黑體" panose="020B0604030504040204" pitchFamily="34" charset="-120"/>
+                <a:ea typeface="微軟正黑體" panose="020B0604030504040204" pitchFamily="34" charset="-120"/>
+              </a:rPr>
+              <a:t>2026-05-01</a:t>
+            </a:r>
+            <a:r>
+              <a:rPr lang="zh-TW" altLang="en-US" sz="1100" b="1" dirty="0">
+                <a:latin typeface="微軟正黑體" panose="020B0604030504040204" pitchFamily="34" charset="-120"/>
+                <a:ea typeface="微軟正黑體" panose="020B0604030504040204" pitchFamily="34" charset="-120"/>
+              </a:rPr>
+              <a:t> </a:t>
+            </a:r>
+            <a:r>
+              <a:rPr lang="en-US" altLang="zh-TW" sz="1100" b="1" dirty="0">
+                <a:latin typeface="微軟正黑體" panose="020B0604030504040204" pitchFamily="34" charset="-120"/>
+                <a:ea typeface="微軟正黑體" panose="020B0604030504040204" pitchFamily="34" charset="-120"/>
+              </a:rPr>
+              <a:t>23:50:52</a:t>
+            </a:r>
+            <a:endParaRPr lang="zh-TW" altLang="en-US" sz="1100" b="1" dirty="0">
+              <a:latin typeface="微軟正黑體" panose="020B0604030504040204" pitchFamily="34" charset="-120"/>
+              <a:ea typeface="微軟正黑體" panose="020B0604030504040204" pitchFamily="34" charset="-120"/>
+            </a:endParaRPr>
+          </a:p>
+        </p:txBody>
+      </p:sp>
+      <p:sp>
+        <p:nvSpPr>
+          <p:cNvPr id="8" name="矩形: 圓角 7">
+            <a:extLst>
+              <a:ext uri="{FF2B5EF4-FFF2-40B4-BE49-F238E27FC236}">
+                <a16:creationId xmlns:a16="http://schemas.microsoft.com/office/drawing/2014/main" id="{462DC8E8-1CB4-48CF-BEAE-2E08FD574CF9}"/>
+              </a:ext>
+            </a:extLst>
+          </p:cNvPr>
+          <p:cNvSpPr/>
+          <p:nvPr/>
+        </p:nvSpPr>
+        <p:spPr>
+          <a:xfrm>
+            <a:off x="4972594" y="801124"/>
+            <a:ext cx="888658" cy="222068"/>
+          </a:xfrm>
+          <a:prstGeom prst="roundRect">
+            <a:avLst/>
+          </a:prstGeom>
+          <a:solidFill>
+            <a:schemeClr val="accent6">
+              <a:lumMod val="50000"/>
+            </a:schemeClr>
+          </a:solidFill>
+        </p:spPr>
+        <p:style>
+          <a:lnRef idx="2">
+            <a:schemeClr val="accent1">
+              <a:shade val="50000"/>
+            </a:schemeClr>
+          </a:lnRef>
+          <a:fillRef idx="1">
+            <a:schemeClr val="accent1"/>
+          </a:fillRef>
+          <a:effectRef idx="0">
+            <a:schemeClr val="accent1"/>
+          </a:effectRef>
+          <a:fontRef idx="minor">
+            <a:schemeClr val="lt1"/>
+          </a:fontRef>
+        </p:style>
+        <p:txBody>
+          <a:bodyPr rtlCol="0" anchor="ctr"/>
+          <a:lstStyle/>
+          <a:p>
+            <a:pPr algn="ctr"/>
+            <a:r>
+              <a:rPr lang="zh-TW" altLang="en-US" sz="1050" dirty="0">
+                <a:latin typeface="微軟正黑體" panose="020B0604030504040204" pitchFamily="34" charset="-120"/>
+                <a:ea typeface="微軟正黑體" panose="020B0604030504040204" pitchFamily="34" charset="-120"/>
+              </a:rPr>
+              <a:t>更新資料</a:t>
+            </a:r>
+          </a:p>
+        </p:txBody>
+      </p:sp>
+      <p:sp>
+        <p:nvSpPr>
+          <p:cNvPr id="9" name="文字方塊 8">
+            <a:extLst>
+              <a:ext uri="{FF2B5EF4-FFF2-40B4-BE49-F238E27FC236}">
+                <a16:creationId xmlns:a16="http://schemas.microsoft.com/office/drawing/2014/main" id="{9EAD342F-0599-4991-AB7B-ED223C7F815A}"/>
+              </a:ext>
+            </a:extLst>
+          </p:cNvPr>
+          <p:cNvSpPr txBox="1"/>
+          <p:nvPr/>
+        </p:nvSpPr>
+        <p:spPr>
+          <a:xfrm>
+            <a:off x="2166258" y="1069982"/>
+            <a:ext cx="2627812" cy="261610"/>
+          </a:xfrm>
+          <a:prstGeom prst="rect">
+            <a:avLst/>
+          </a:prstGeom>
+          <a:noFill/>
+        </p:spPr>
+        <p:txBody>
+          <a:bodyPr wrap="square" rtlCol="0">
+            <a:spAutoFit/>
+          </a:bodyPr>
+          <a:lstStyle/>
+          <a:p>
+            <a:r>
+              <a:rPr lang="zh-TW" altLang="en-US" sz="1100" dirty="0">
+                <a:latin typeface="微軟正黑體" panose="020B0604030504040204" pitchFamily="34" charset="-120"/>
+                <a:ea typeface="微軟正黑體" panose="020B0604030504040204" pitchFamily="34" charset="-120"/>
+              </a:rPr>
+              <a:t>常用地點</a:t>
+            </a:r>
+          </a:p>
+        </p:txBody>
+      </p:sp>
+      <p:sp>
+        <p:nvSpPr>
+          <p:cNvPr id="10" name="矩形: 圓角 9">
+            <a:extLst>
+              <a:ext uri="{FF2B5EF4-FFF2-40B4-BE49-F238E27FC236}">
+                <a16:creationId xmlns:a16="http://schemas.microsoft.com/office/drawing/2014/main" id="{E40F250B-9FB2-4172-88E9-DBD52E5D6048}"/>
+              </a:ext>
+            </a:extLst>
+          </p:cNvPr>
+          <p:cNvSpPr/>
+          <p:nvPr/>
+        </p:nvSpPr>
+        <p:spPr>
+          <a:xfrm>
+            <a:off x="2268583" y="1429694"/>
+            <a:ext cx="888658" cy="222068"/>
+          </a:xfrm>
+          <a:prstGeom prst="roundRect">
+            <a:avLst>
+              <a:gd name="adj" fmla="val 0"/>
+            </a:avLst>
+          </a:prstGeom>
+          <a:solidFill>
+            <a:schemeClr val="accent6">
+              <a:lumMod val="50000"/>
+            </a:schemeClr>
+          </a:solidFill>
+        </p:spPr>
+        <p:style>
+          <a:lnRef idx="2">
+            <a:schemeClr val="accent1">
+              <a:shade val="50000"/>
+            </a:schemeClr>
+          </a:lnRef>
+          <a:fillRef idx="1">
+            <a:schemeClr val="accent1"/>
+          </a:fillRef>
+          <a:effectRef idx="0">
+            <a:schemeClr val="accent1"/>
+          </a:effectRef>
+          <a:fontRef idx="minor">
+            <a:schemeClr val="lt1"/>
+          </a:fontRef>
+        </p:style>
+        <p:txBody>
+          <a:bodyPr rtlCol="0" anchor="ctr"/>
+          <a:lstStyle/>
+          <a:p>
+            <a:pPr algn="ctr"/>
+            <a:r>
+              <a:rPr lang="zh-TW" altLang="en-US" sz="1050" dirty="0">
+                <a:latin typeface="微軟正黑體" panose="020B0604030504040204" pitchFamily="34" charset="-120"/>
+                <a:ea typeface="微軟正黑體" panose="020B0604030504040204" pitchFamily="34" charset="-120"/>
+              </a:rPr>
+              <a:t>首都羅東</a:t>
+            </a:r>
+          </a:p>
+        </p:txBody>
+      </p:sp>
+      <p:sp>
+        <p:nvSpPr>
+          <p:cNvPr id="11" name="矩形: 圓角 10">
+            <a:extLst>
+              <a:ext uri="{FF2B5EF4-FFF2-40B4-BE49-F238E27FC236}">
+                <a16:creationId xmlns:a16="http://schemas.microsoft.com/office/drawing/2014/main" id="{6DA52E17-09D1-41C5-8E15-68AA1B8E7191}"/>
+              </a:ext>
+            </a:extLst>
+          </p:cNvPr>
+          <p:cNvSpPr/>
+          <p:nvPr/>
+        </p:nvSpPr>
+        <p:spPr>
+          <a:xfrm>
+            <a:off x="3157241" y="1429694"/>
+            <a:ext cx="888658" cy="222068"/>
+          </a:xfrm>
+          <a:prstGeom prst="roundRect">
+            <a:avLst>
+              <a:gd name="adj" fmla="val 0"/>
+            </a:avLst>
+          </a:prstGeom>
+          <a:solidFill>
+            <a:schemeClr val="bg2"/>
+          </a:solidFill>
+        </p:spPr>
+        <p:style>
+          <a:lnRef idx="2">
+            <a:schemeClr val="accent1">
+              <a:shade val="50000"/>
+            </a:schemeClr>
+          </a:lnRef>
+          <a:fillRef idx="1">
+            <a:schemeClr val="accent1"/>
+          </a:fillRef>
+          <a:effectRef idx="0">
+            <a:schemeClr val="accent1"/>
+          </a:effectRef>
+          <a:fontRef idx="minor">
+            <a:schemeClr val="lt1"/>
+          </a:fontRef>
+        </p:style>
+        <p:txBody>
+          <a:bodyPr rtlCol="0" anchor="ctr"/>
+          <a:lstStyle/>
+          <a:p>
+            <a:pPr algn="ctr"/>
+            <a:r>
+              <a:rPr lang="zh-TW" altLang="en-US" sz="1050" dirty="0">
+                <a:solidFill>
+                  <a:schemeClr val="tx1"/>
+                </a:solidFill>
+                <a:latin typeface="微軟正黑體" panose="020B0604030504040204" pitchFamily="34" charset="-120"/>
+                <a:ea typeface="微軟正黑體" panose="020B0604030504040204" pitchFamily="34" charset="-120"/>
+              </a:rPr>
+              <a:t>公正國小</a:t>
+            </a:r>
+          </a:p>
+        </p:txBody>
+      </p:sp>
+      <p:sp>
+        <p:nvSpPr>
+          <p:cNvPr id="12" name="矩形: 圓角 11">
+            <a:extLst>
+              <a:ext uri="{FF2B5EF4-FFF2-40B4-BE49-F238E27FC236}">
+                <a16:creationId xmlns:a16="http://schemas.microsoft.com/office/drawing/2014/main" id="{58407369-ABBD-470B-83B5-E9811ED27FB4}"/>
+              </a:ext>
+            </a:extLst>
+          </p:cNvPr>
+          <p:cNvSpPr/>
+          <p:nvPr/>
+        </p:nvSpPr>
+        <p:spPr>
+          <a:xfrm>
+            <a:off x="4045899" y="1429694"/>
+            <a:ext cx="888658" cy="222068"/>
+          </a:xfrm>
+          <a:prstGeom prst="roundRect">
+            <a:avLst>
+              <a:gd name="adj" fmla="val 0"/>
+            </a:avLst>
+          </a:prstGeom>
+          <a:solidFill>
+            <a:schemeClr val="bg2"/>
+          </a:solidFill>
+        </p:spPr>
+        <p:style>
+          <a:lnRef idx="2">
+            <a:schemeClr val="accent1">
+              <a:shade val="50000"/>
+            </a:schemeClr>
+          </a:lnRef>
+          <a:fillRef idx="1">
+            <a:schemeClr val="accent1"/>
+          </a:fillRef>
+          <a:effectRef idx="0">
+            <a:schemeClr val="accent1"/>
+          </a:effectRef>
+          <a:fontRef idx="minor">
+            <a:schemeClr val="lt1"/>
+          </a:fontRef>
+        </p:style>
+        <p:txBody>
+          <a:bodyPr rtlCol="0" anchor="ctr"/>
+          <a:lstStyle/>
+          <a:p>
+            <a:pPr algn="ctr"/>
+            <a:r>
+              <a:rPr lang="zh-TW" altLang="en-US" sz="1050" dirty="0">
+                <a:solidFill>
+                  <a:schemeClr val="tx1"/>
+                </a:solidFill>
+                <a:latin typeface="微軟正黑體" panose="020B0604030504040204" pitchFamily="34" charset="-120"/>
+                <a:ea typeface="微軟正黑體" panose="020B0604030504040204" pitchFamily="34" charset="-120"/>
+              </a:rPr>
+              <a:t>前站</a:t>
+            </a:r>
+          </a:p>
+        </p:txBody>
+      </p:sp>
+      <p:sp>
+        <p:nvSpPr>
+          <p:cNvPr id="13" name="矩形: 圓角 12">
+            <a:extLst>
+              <a:ext uri="{FF2B5EF4-FFF2-40B4-BE49-F238E27FC236}">
+                <a16:creationId xmlns:a16="http://schemas.microsoft.com/office/drawing/2014/main" id="{6CF9B622-2BDD-4F3C-8E15-0412977B36E6}"/>
+              </a:ext>
+            </a:extLst>
+          </p:cNvPr>
+          <p:cNvSpPr/>
+          <p:nvPr/>
+        </p:nvSpPr>
+        <p:spPr>
+          <a:xfrm>
+            <a:off x="4934557" y="1429694"/>
+            <a:ext cx="888658" cy="222068"/>
+          </a:xfrm>
+          <a:prstGeom prst="roundRect">
+            <a:avLst>
+              <a:gd name="adj" fmla="val 0"/>
+            </a:avLst>
+          </a:prstGeom>
+          <a:solidFill>
+            <a:schemeClr val="bg2"/>
+          </a:solidFill>
+        </p:spPr>
+        <p:style>
+          <a:lnRef idx="2">
+            <a:schemeClr val="accent1">
+              <a:shade val="50000"/>
+            </a:schemeClr>
+          </a:lnRef>
+          <a:fillRef idx="1">
+            <a:schemeClr val="accent1"/>
+          </a:fillRef>
+          <a:effectRef idx="0">
+            <a:schemeClr val="accent1"/>
+          </a:effectRef>
+          <a:fontRef idx="minor">
+            <a:schemeClr val="lt1"/>
+          </a:fontRef>
+        </p:style>
+        <p:txBody>
+          <a:bodyPr rtlCol="0" anchor="ctr"/>
+          <a:lstStyle/>
+          <a:p>
+            <a:pPr algn="ctr"/>
+            <a:r>
+              <a:rPr lang="zh-TW" altLang="en-US" sz="1050" dirty="0">
+                <a:solidFill>
+                  <a:schemeClr val="tx1"/>
+                </a:solidFill>
+                <a:latin typeface="微軟正黑體" panose="020B0604030504040204" pitchFamily="34" charset="-120"/>
+                <a:ea typeface="微軟正黑體" panose="020B0604030504040204" pitchFamily="34" charset="-120"/>
+              </a:rPr>
+              <a:t>後站</a:t>
+            </a:r>
+          </a:p>
+        </p:txBody>
+      </p:sp>
+      <p:pic>
+        <p:nvPicPr>
+          <p:cNvPr id="3" name="圖形 2" descr="太陽 以實心填滿">
+            <a:extLst>
+              <a:ext uri="{FF2B5EF4-FFF2-40B4-BE49-F238E27FC236}">
+                <a16:creationId xmlns:a16="http://schemas.microsoft.com/office/drawing/2014/main" id="{2B95A8D5-51C9-4D0F-B60B-87802C66EA44}"/>
+              </a:ext>
+            </a:extLst>
+          </p:cNvPr>
+          <p:cNvPicPr>
+            <a:picLocks noChangeAspect="1"/>
+          </p:cNvPicPr>
+          <p:nvPr/>
+        </p:nvPicPr>
+        <p:blipFill>
+          <a:blip r:embed="rId2">
+            <a:extLst>
+              <a:ext uri="{28A0092B-C50C-407E-A947-70E740481C1C}">
+                <a14:useLocalDpi xmlns:a14="http://schemas.microsoft.com/office/drawing/2010/main" val="0"/>
+              </a:ext>
+              <a:ext uri="{96DAC541-7B7A-43D3-8B79-37D633B846F1}">
+                <asvg:svgBlip xmlns:asvg="http://schemas.microsoft.com/office/drawing/2016/SVG/main" r:embed="rId3"/>
+              </a:ext>
+            </a:extLst>
+          </a:blip>
+          <a:stretch>
+            <a:fillRect/>
+          </a:stretch>
+        </p:blipFill>
+        <p:spPr>
+          <a:xfrm>
+            <a:off x="2205139" y="311760"/>
+            <a:ext cx="327844" cy="327844"/>
+          </a:xfrm>
+          <a:prstGeom prst="rect">
+            <a:avLst/>
+          </a:prstGeom>
+          <a:effectLst>
+            <a:outerShdw blurRad="50800" dist="38100" dir="2700000" algn="tl" rotWithShape="0">
+              <a:prstClr val="black">
+                <a:alpha val="40000"/>
+              </a:prstClr>
+            </a:outerShdw>
+          </a:effectLst>
+        </p:spPr>
+      </p:pic>
+      <p:pic>
+        <p:nvPicPr>
+          <p:cNvPr id="5" name="圖形 4" descr="貓 以實心填滿">
+            <a:extLst>
+              <a:ext uri="{FF2B5EF4-FFF2-40B4-BE49-F238E27FC236}">
+                <a16:creationId xmlns:a16="http://schemas.microsoft.com/office/drawing/2014/main" id="{CD8778E0-D3C3-4DB6-83A2-AEC461F21432}"/>
+              </a:ext>
+            </a:extLst>
+          </p:cNvPr>
+          <p:cNvPicPr>
+            <a:picLocks noChangeAspect="1"/>
+          </p:cNvPicPr>
+          <p:nvPr/>
+        </p:nvPicPr>
+        <p:blipFill>
+          <a:blip r:embed="rId4">
+            <a:extLst>
+              <a:ext uri="{28A0092B-C50C-407E-A947-70E740481C1C}">
+                <a14:useLocalDpi xmlns:a14="http://schemas.microsoft.com/office/drawing/2010/main" val="0"/>
+              </a:ext>
+              <a:ext uri="{96DAC541-7B7A-43D3-8B79-37D633B846F1}">
+                <asvg:svgBlip xmlns:asvg="http://schemas.microsoft.com/office/drawing/2016/SVG/main" r:embed="rId5"/>
+              </a:ext>
+            </a:extLst>
+          </a:blip>
+          <a:stretch>
+            <a:fillRect/>
+          </a:stretch>
+        </p:blipFill>
+        <p:spPr>
+          <a:xfrm>
+            <a:off x="2205139" y="2394000"/>
+            <a:ext cx="952102" cy="952102"/>
+          </a:xfrm>
+          <a:prstGeom prst="rect">
+            <a:avLst/>
+          </a:prstGeom>
+        </p:spPr>
+      </p:pic>
+      <p:sp>
+        <p:nvSpPr>
+          <p:cNvPr id="26" name="文字方塊 25">
+            <a:extLst>
+              <a:ext uri="{FF2B5EF4-FFF2-40B4-BE49-F238E27FC236}">
+                <a16:creationId xmlns:a16="http://schemas.microsoft.com/office/drawing/2014/main" id="{45D07CA7-8C74-47C7-8996-9149ADA507E6}"/>
+              </a:ext>
+            </a:extLst>
+          </p:cNvPr>
+          <p:cNvSpPr txBox="1"/>
+          <p:nvPr/>
+        </p:nvSpPr>
+        <p:spPr>
+          <a:xfrm>
+            <a:off x="3250075" y="2351699"/>
+            <a:ext cx="2573140" cy="1015663"/>
+          </a:xfrm>
+          <a:prstGeom prst="rect">
+            <a:avLst/>
+          </a:prstGeom>
+          <a:noFill/>
+        </p:spPr>
+        <p:txBody>
+          <a:bodyPr wrap="none" rtlCol="0">
+            <a:spAutoFit/>
+          </a:bodyPr>
+          <a:lstStyle/>
+          <a:p>
+            <a:r>
+              <a:rPr lang="zh-TW" altLang="en-US" sz="1200" dirty="0">
+                <a:latin typeface="微軟正黑體" panose="020B0604030504040204" pitchFamily="34" charset="-120"/>
+                <a:ea typeface="微軟正黑體" panose="020B0604030504040204" pitchFamily="34" charset="-120"/>
+              </a:rPr>
+              <a:t>網頁掛掉了</a:t>
+            </a:r>
+            <a:r>
+              <a:rPr lang="ja-JP" altLang="en-US" sz="1200" dirty="0">
+                <a:latin typeface="微軟正黑體" panose="020B0604030504040204" pitchFamily="34" charset="-120"/>
+                <a:ea typeface="微軟正黑體" panose="020B0604030504040204" pitchFamily="34" charset="-120"/>
+              </a:rPr>
+              <a:t>ヽ</a:t>
+            </a:r>
+            <a:r>
+              <a:rPr lang="en-US" altLang="ja-JP" sz="1200" dirty="0">
+                <a:latin typeface="微軟正黑體" panose="020B0604030504040204" pitchFamily="34" charset="-120"/>
+                <a:ea typeface="微軟正黑體" panose="020B0604030504040204" pitchFamily="34" charset="-120"/>
+              </a:rPr>
+              <a:t>(</a:t>
+            </a:r>
+            <a:r>
+              <a:rPr lang="ja-JP" altLang="en-US" sz="1200" dirty="0">
+                <a:latin typeface="微軟正黑體" panose="020B0604030504040204" pitchFamily="34" charset="-120"/>
+                <a:ea typeface="微軟正黑體" panose="020B0604030504040204" pitchFamily="34" charset="-120"/>
+              </a:rPr>
+              <a:t>ﾟ</a:t>
+            </a:r>
+            <a:r>
+              <a:rPr lang="en-US" altLang="ja-JP" sz="1200" dirty="0">
+                <a:latin typeface="微軟正黑體" panose="020B0604030504040204" pitchFamily="34" charset="-120"/>
+                <a:ea typeface="微軟正黑體" panose="020B0604030504040204" pitchFamily="34" charset="-120"/>
+              </a:rPr>
+              <a:t>Д </a:t>
+            </a:r>
+            <a:r>
+              <a:rPr lang="ja-JP" altLang="en-US" sz="1200" dirty="0">
+                <a:latin typeface="微軟正黑體" panose="020B0604030504040204" pitchFamily="34" charset="-120"/>
+                <a:ea typeface="微軟正黑體" panose="020B0604030504040204" pitchFamily="34" charset="-120"/>
+              </a:rPr>
+              <a:t>ﾟ</a:t>
+            </a:r>
+            <a:r>
+              <a:rPr lang="en-US" altLang="ja-JP" sz="1200" dirty="0">
+                <a:latin typeface="微軟正黑體" panose="020B0604030504040204" pitchFamily="34" charset="-120"/>
+                <a:ea typeface="微軟正黑體" panose="020B0604030504040204" pitchFamily="34" charset="-120"/>
+              </a:rPr>
+              <a:t>; )</a:t>
+            </a:r>
+            <a:r>
+              <a:rPr lang="ja-JP" altLang="en-US" sz="1200" dirty="0">
+                <a:latin typeface="微軟正黑體" panose="020B0604030504040204" pitchFamily="34" charset="-120"/>
+                <a:ea typeface="微軟正黑體" panose="020B0604030504040204" pitchFamily="34" charset="-120"/>
+              </a:rPr>
+              <a:t>ﾉ</a:t>
+            </a:r>
+            <a:endParaRPr lang="en-US" altLang="zh-TW" sz="1200" dirty="0">
+              <a:latin typeface="微軟正黑體" panose="020B0604030504040204" pitchFamily="34" charset="-120"/>
+              <a:ea typeface="微軟正黑體" panose="020B0604030504040204" pitchFamily="34" charset="-120"/>
+            </a:endParaRPr>
+          </a:p>
+          <a:p>
+            <a:endParaRPr lang="en-US" altLang="zh-TW" sz="1200" dirty="0">
+              <a:latin typeface="微軟正黑體" panose="020B0604030504040204" pitchFamily="34" charset="-120"/>
+              <a:ea typeface="微軟正黑體" panose="020B0604030504040204" pitchFamily="34" charset="-120"/>
+            </a:endParaRPr>
+          </a:p>
+          <a:p>
+            <a:r>
+              <a:rPr lang="zh-TW" altLang="en-US" sz="1200" dirty="0">
+                <a:latin typeface="微軟正黑體" panose="020B0604030504040204" pitchFamily="34" charset="-120"/>
+                <a:ea typeface="微軟正黑體" panose="020B0604030504040204" pitchFamily="34" charset="-120"/>
+              </a:rPr>
+              <a:t>可改去下面兩個網站試試看</a:t>
+            </a:r>
+            <a:endParaRPr lang="en-US" altLang="zh-TW" sz="1200" dirty="0">
+              <a:latin typeface="微軟正黑體" panose="020B0604030504040204" pitchFamily="34" charset="-120"/>
+              <a:ea typeface="微軟正黑體" panose="020B0604030504040204" pitchFamily="34" charset="-120"/>
+            </a:endParaRPr>
+          </a:p>
+          <a:p>
+            <a:endParaRPr lang="en-US" altLang="zh-TW" sz="1200" dirty="0">
+              <a:latin typeface="微軟正黑體" panose="020B0604030504040204" pitchFamily="34" charset="-120"/>
+              <a:ea typeface="微軟正黑體" panose="020B0604030504040204" pitchFamily="34" charset="-120"/>
+            </a:endParaRPr>
+          </a:p>
+          <a:p>
+            <a:r>
+              <a:rPr lang="zh-TW" altLang="en-US" sz="1200" dirty="0">
+                <a:latin typeface="微軟正黑體" panose="020B0604030504040204" pitchFamily="34" charset="-120"/>
+                <a:ea typeface="微軟正黑體" panose="020B0604030504040204" pitchFamily="34" charset="-120"/>
+                <a:hlinkClick r:id="rId6"/>
+              </a:rPr>
+              <a:t>停車我最大</a:t>
+            </a:r>
+            <a:r>
+              <a:rPr lang="zh-TW" altLang="en-US" sz="1200" dirty="0">
+                <a:latin typeface="微軟正黑體" panose="020B0604030504040204" pitchFamily="34" charset="-120"/>
+                <a:ea typeface="微軟正黑體" panose="020B0604030504040204" pitchFamily="34" charset="-120"/>
+              </a:rPr>
+              <a:t>            </a:t>
+            </a:r>
+            <a:r>
+              <a:rPr lang="zh-TW" altLang="en-US" sz="1200" dirty="0">
+                <a:latin typeface="微軟正黑體" panose="020B0604030504040204" pitchFamily="34" charset="-120"/>
+                <a:ea typeface="微軟正黑體" panose="020B0604030504040204" pitchFamily="34" charset="-120"/>
+                <a:hlinkClick r:id="rId7"/>
+              </a:rPr>
+              <a:t>宜蘭縣交通資訊</a:t>
+            </a:r>
+            <a:endParaRPr lang="zh-TW" altLang="en-US" sz="1200" dirty="0">
+              <a:latin typeface="微軟正黑體" panose="020B0604030504040204" pitchFamily="34" charset="-120"/>
+              <a:ea typeface="微軟正黑體" panose="020B0604030504040204" pitchFamily="34" charset="-120"/>
+            </a:endParaRPr>
+          </a:p>
+        </p:txBody>
+      </p:sp>
+    </p:spTree>
+    <p:extLst>
+      <p:ext uri="{BB962C8B-B14F-4D97-AF65-F5344CB8AC3E}">
+        <p14:creationId xmlns:p14="http://schemas.microsoft.com/office/powerpoint/2010/main" val="955809027"/>
       </p:ext>
     </p:extLst>
   </p:cSld>

--- a/doc/簡報1.pptx
+++ b/doc/簡報1.pptx
@@ -8,6 +8,7 @@
     <p:sldId id="256" r:id="rId2"/>
     <p:sldId id="257" r:id="rId3"/>
     <p:sldId id="258" r:id="rId4"/>
+    <p:sldId id="259" r:id="rId5"/>
   </p:sldIdLst>
   <p:sldSz cx="12192000" cy="6858000"/>
   <p:notesSz cx="6858000" cy="9144000"/>
@@ -5865,8 +5866,8 @@
         </p:blipFill>
         <p:spPr>
           <a:xfrm>
-            <a:off x="4859841" y="3823401"/>
-            <a:ext cx="394769" cy="394769"/>
+            <a:off x="4934557" y="3898117"/>
+            <a:ext cx="320053" cy="320053"/>
           </a:xfrm>
           <a:prstGeom prst="rect">
             <a:avLst/>
@@ -5904,7 +5905,7 @@
         </p:blipFill>
         <p:spPr>
           <a:xfrm>
-            <a:off x="2437261" y="4343388"/>
+            <a:off x="3264032" y="4218170"/>
             <a:ext cx="641714" cy="641714"/>
           </a:xfrm>
           <a:prstGeom prst="rect">
@@ -6731,6 +6732,502 @@
     <p:extLst>
       <p:ext uri="{BB962C8B-B14F-4D97-AF65-F5344CB8AC3E}">
         <p14:creationId xmlns:p14="http://schemas.microsoft.com/office/powerpoint/2010/main" val="955809027"/>
+      </p:ext>
+    </p:extLst>
+  </p:cSld>
+  <p:clrMapOvr>
+    <a:masterClrMapping/>
+  </p:clrMapOvr>
+</p:sld>
+</file>
+
+<file path=ppt/slides/slide4.xml><?xml version="1.0" encoding="utf-8"?>
+<p:sld xmlns:a="http://schemas.openxmlformats.org/drawingml/2006/main" xmlns:r="http://schemas.openxmlformats.org/officeDocument/2006/relationships" xmlns:p="http://schemas.openxmlformats.org/presentationml/2006/main">
+  <p:cSld>
+    <p:bg>
+      <p:bgPr>
+        <a:solidFill>
+          <a:schemeClr val="accent6">
+            <a:lumMod val="40000"/>
+            <a:lumOff val="60000"/>
+          </a:schemeClr>
+        </a:solidFill>
+        <a:effectLst/>
+      </p:bgPr>
+    </p:bg>
+    <p:spTree>
+      <p:nvGrpSpPr>
+        <p:cNvPr id="1" name=""/>
+        <p:cNvGrpSpPr/>
+        <p:nvPr/>
+      </p:nvGrpSpPr>
+      <p:grpSpPr>
+        <a:xfrm>
+          <a:off x="0" y="0"/>
+          <a:ext cx="0" cy="0"/>
+          <a:chOff x="0" y="0"/>
+          <a:chExt cx="0" cy="0"/>
+        </a:xfrm>
+      </p:grpSpPr>
+      <p:pic>
+        <p:nvPicPr>
+          <p:cNvPr id="2" name="圖形 1" descr="貓 以實心填滿">
+            <a:extLst>
+              <a:ext uri="{FF2B5EF4-FFF2-40B4-BE49-F238E27FC236}">
+                <a16:creationId xmlns:a16="http://schemas.microsoft.com/office/drawing/2014/main" id="{91515F68-40AA-4724-8295-1CF783599559}"/>
+              </a:ext>
+            </a:extLst>
+          </p:cNvPr>
+          <p:cNvPicPr>
+            <a:picLocks noChangeAspect="1"/>
+          </p:cNvPicPr>
+          <p:nvPr/>
+        </p:nvPicPr>
+        <p:blipFill>
+          <a:blip r:embed="rId2">
+            <a:extLst>
+              <a:ext uri="{28A0092B-C50C-407E-A947-70E740481C1C}">
+                <a14:useLocalDpi xmlns:a14="http://schemas.microsoft.com/office/drawing/2010/main" val="0"/>
+              </a:ext>
+              <a:ext uri="{96DAC541-7B7A-43D3-8B79-37D633B846F1}">
+                <asvg:svgBlip xmlns:asvg="http://schemas.microsoft.com/office/drawing/2016/SVG/main" r:embed="rId3"/>
+              </a:ext>
+            </a:extLst>
+          </a:blip>
+          <a:stretch>
+            <a:fillRect/>
+          </a:stretch>
+        </p:blipFill>
+        <p:spPr>
+          <a:xfrm>
+            <a:off x="2648040" y="3951310"/>
+            <a:ext cx="421218" cy="406459"/>
+          </a:xfrm>
+          <a:prstGeom prst="rect">
+            <a:avLst/>
+          </a:prstGeom>
+        </p:spPr>
+      </p:pic>
+      <p:pic>
+        <p:nvPicPr>
+          <p:cNvPr id="3" name="圖形 2" descr="貓 以實心填滿">
+            <a:extLst>
+              <a:ext uri="{FF2B5EF4-FFF2-40B4-BE49-F238E27FC236}">
+                <a16:creationId xmlns:a16="http://schemas.microsoft.com/office/drawing/2014/main" id="{99A4C52C-0F43-428C-B6B0-CDB725B3355C}"/>
+              </a:ext>
+            </a:extLst>
+          </p:cNvPr>
+          <p:cNvPicPr>
+            <a:picLocks noChangeAspect="1"/>
+          </p:cNvPicPr>
+          <p:nvPr/>
+        </p:nvPicPr>
+        <p:blipFill>
+          <a:blip r:embed="rId4">
+            <a:extLst>
+              <a:ext uri="{28A0092B-C50C-407E-A947-70E740481C1C}">
+                <a14:useLocalDpi xmlns:a14="http://schemas.microsoft.com/office/drawing/2010/main" val="0"/>
+              </a:ext>
+              <a:ext uri="{96DAC541-7B7A-43D3-8B79-37D633B846F1}">
+                <asvg:svgBlip xmlns:asvg="http://schemas.microsoft.com/office/drawing/2016/SVG/main" r:embed="rId5"/>
+              </a:ext>
+            </a:extLst>
+          </a:blip>
+          <a:stretch>
+            <a:fillRect/>
+          </a:stretch>
+        </p:blipFill>
+        <p:spPr>
+          <a:xfrm>
+            <a:off x="3226119" y="3959636"/>
+            <a:ext cx="421218" cy="406459"/>
+          </a:xfrm>
+          <a:prstGeom prst="rect">
+            <a:avLst/>
+          </a:prstGeom>
+        </p:spPr>
+      </p:pic>
+      <p:pic>
+        <p:nvPicPr>
+          <p:cNvPr id="4" name="圖形 3" descr="貓 以實心填滿">
+            <a:extLst>
+              <a:ext uri="{FF2B5EF4-FFF2-40B4-BE49-F238E27FC236}">
+                <a16:creationId xmlns:a16="http://schemas.microsoft.com/office/drawing/2014/main" id="{2FDFC8B0-15AA-482A-9E37-23D76BDAF830}"/>
+              </a:ext>
+            </a:extLst>
+          </p:cNvPr>
+          <p:cNvPicPr>
+            <a:picLocks noChangeAspect="1"/>
+          </p:cNvPicPr>
+          <p:nvPr/>
+        </p:nvPicPr>
+        <p:blipFill>
+          <a:blip r:embed="rId6">
+            <a:extLst>
+              <a:ext uri="{28A0092B-C50C-407E-A947-70E740481C1C}">
+                <a14:useLocalDpi xmlns:a14="http://schemas.microsoft.com/office/drawing/2010/main" val="0"/>
+              </a:ext>
+              <a:ext uri="{96DAC541-7B7A-43D3-8B79-37D633B846F1}">
+                <asvg:svgBlip xmlns:asvg="http://schemas.microsoft.com/office/drawing/2016/SVG/main" r:embed="rId7"/>
+              </a:ext>
+            </a:extLst>
+          </a:blip>
+          <a:stretch>
+            <a:fillRect/>
+          </a:stretch>
+        </p:blipFill>
+        <p:spPr>
+          <a:xfrm>
+            <a:off x="3730157" y="3951309"/>
+            <a:ext cx="421218" cy="406459"/>
+          </a:xfrm>
+          <a:prstGeom prst="rect">
+            <a:avLst/>
+          </a:prstGeom>
+        </p:spPr>
+      </p:pic>
+      <p:pic>
+        <p:nvPicPr>
+          <p:cNvPr id="5" name="圖形 4" descr="貓 以實心填滿">
+            <a:extLst>
+              <a:ext uri="{FF2B5EF4-FFF2-40B4-BE49-F238E27FC236}">
+                <a16:creationId xmlns:a16="http://schemas.microsoft.com/office/drawing/2014/main" id="{61F40244-D6E8-4E50-B3F8-BE9E8B9EF081}"/>
+              </a:ext>
+            </a:extLst>
+          </p:cNvPr>
+          <p:cNvPicPr>
+            <a:picLocks noChangeAspect="1"/>
+          </p:cNvPicPr>
+          <p:nvPr/>
+        </p:nvPicPr>
+        <p:blipFill>
+          <a:blip r:embed="rId8">
+            <a:extLst>
+              <a:ext uri="{28A0092B-C50C-407E-A947-70E740481C1C}">
+                <a14:useLocalDpi xmlns:a14="http://schemas.microsoft.com/office/drawing/2010/main" val="0"/>
+              </a:ext>
+              <a:ext uri="{96DAC541-7B7A-43D3-8B79-37D633B846F1}">
+                <asvg:svgBlip xmlns:asvg="http://schemas.microsoft.com/office/drawing/2016/SVG/main" r:embed="rId9"/>
+              </a:ext>
+            </a:extLst>
+          </a:blip>
+          <a:stretch>
+            <a:fillRect/>
+          </a:stretch>
+        </p:blipFill>
+        <p:spPr>
+          <a:xfrm>
+            <a:off x="2144002" y="3965475"/>
+            <a:ext cx="421218" cy="406459"/>
+          </a:xfrm>
+          <a:prstGeom prst="rect">
+            <a:avLst/>
+          </a:prstGeom>
+        </p:spPr>
+      </p:pic>
+      <p:pic>
+        <p:nvPicPr>
+          <p:cNvPr id="6" name="圖形 5" descr="貓 以實心填滿">
+            <a:extLst>
+              <a:ext uri="{FF2B5EF4-FFF2-40B4-BE49-F238E27FC236}">
+                <a16:creationId xmlns:a16="http://schemas.microsoft.com/office/drawing/2014/main" id="{634ECC27-63BE-493C-AAFC-A280AAB54A35}"/>
+              </a:ext>
+            </a:extLst>
+          </p:cNvPr>
+          <p:cNvPicPr>
+            <a:picLocks noChangeAspect="1"/>
+          </p:cNvPicPr>
+          <p:nvPr/>
+        </p:nvPicPr>
+        <p:blipFill>
+          <a:blip r:embed="rId10">
+            <a:extLst>
+              <a:ext uri="{28A0092B-C50C-407E-A947-70E740481C1C}">
+                <a14:useLocalDpi xmlns:a14="http://schemas.microsoft.com/office/drawing/2010/main" val="0"/>
+              </a:ext>
+              <a:ext uri="{96DAC541-7B7A-43D3-8B79-37D633B846F1}">
+                <asvg:svgBlip xmlns:asvg="http://schemas.microsoft.com/office/drawing/2016/SVG/main" r:embed="rId11"/>
+              </a:ext>
+            </a:extLst>
+          </a:blip>
+          <a:stretch>
+            <a:fillRect/>
+          </a:stretch>
+        </p:blipFill>
+        <p:spPr>
+          <a:xfrm>
+            <a:off x="4234195" y="3951310"/>
+            <a:ext cx="421218" cy="406459"/>
+          </a:xfrm>
+          <a:prstGeom prst="rect">
+            <a:avLst/>
+          </a:prstGeom>
+        </p:spPr>
+      </p:pic>
+      <p:sp>
+        <p:nvSpPr>
+          <p:cNvPr id="7" name="橢圓 6">
+            <a:extLst>
+              <a:ext uri="{FF2B5EF4-FFF2-40B4-BE49-F238E27FC236}">
+                <a16:creationId xmlns:a16="http://schemas.microsoft.com/office/drawing/2014/main" id="{7D2D0D50-71A9-4462-B002-B52304814F9D}"/>
+              </a:ext>
+            </a:extLst>
+          </p:cNvPr>
+          <p:cNvSpPr/>
+          <p:nvPr/>
+        </p:nvSpPr>
+        <p:spPr>
+          <a:xfrm>
+            <a:off x="2330592" y="4153067"/>
+            <a:ext cx="64195" cy="130629"/>
+          </a:xfrm>
+          <a:prstGeom prst="ellipse">
+            <a:avLst/>
+          </a:prstGeom>
+          <a:solidFill>
+            <a:srgbClr val="A5A5A5"/>
+          </a:solidFill>
+          <a:ln>
+            <a:noFill/>
+          </a:ln>
+        </p:spPr>
+        <p:style>
+          <a:lnRef idx="2">
+            <a:schemeClr val="accent1">
+              <a:shade val="50000"/>
+            </a:schemeClr>
+          </a:lnRef>
+          <a:fillRef idx="1">
+            <a:schemeClr val="accent1"/>
+          </a:fillRef>
+          <a:effectRef idx="0">
+            <a:schemeClr val="accent1"/>
+          </a:effectRef>
+          <a:fontRef idx="minor">
+            <a:schemeClr val="lt1"/>
+          </a:fontRef>
+        </p:style>
+        <p:txBody>
+          <a:bodyPr rtlCol="0" anchor="ctr"/>
+          <a:lstStyle/>
+          <a:p>
+            <a:pPr algn="ctr"/>
+            <a:endParaRPr lang="zh-TW" altLang="en-US"/>
+          </a:p>
+        </p:txBody>
+      </p:sp>
+      <p:sp>
+        <p:nvSpPr>
+          <p:cNvPr id="8" name="橢圓 7">
+            <a:extLst>
+              <a:ext uri="{FF2B5EF4-FFF2-40B4-BE49-F238E27FC236}">
+                <a16:creationId xmlns:a16="http://schemas.microsoft.com/office/drawing/2014/main" id="{6D3C8438-FCD5-4226-8063-0F9A27562C39}"/>
+              </a:ext>
+            </a:extLst>
+          </p:cNvPr>
+          <p:cNvSpPr/>
+          <p:nvPr/>
+        </p:nvSpPr>
+        <p:spPr>
+          <a:xfrm>
+            <a:off x="2835137" y="4134942"/>
+            <a:ext cx="64195" cy="130629"/>
+          </a:xfrm>
+          <a:prstGeom prst="ellipse">
+            <a:avLst/>
+          </a:prstGeom>
+          <a:solidFill>
+            <a:srgbClr val="5B9BD5"/>
+          </a:solidFill>
+          <a:ln>
+            <a:noFill/>
+          </a:ln>
+        </p:spPr>
+        <p:style>
+          <a:lnRef idx="2">
+            <a:schemeClr val="accent1">
+              <a:shade val="50000"/>
+            </a:schemeClr>
+          </a:lnRef>
+          <a:fillRef idx="1">
+            <a:schemeClr val="accent1"/>
+          </a:fillRef>
+          <a:effectRef idx="0">
+            <a:schemeClr val="accent1"/>
+          </a:effectRef>
+          <a:fontRef idx="minor">
+            <a:schemeClr val="lt1"/>
+          </a:fontRef>
+        </p:style>
+        <p:txBody>
+          <a:bodyPr rtlCol="0" anchor="ctr"/>
+          <a:lstStyle/>
+          <a:p>
+            <a:pPr algn="ctr"/>
+            <a:endParaRPr lang="zh-TW" altLang="en-US"/>
+          </a:p>
+        </p:txBody>
+      </p:sp>
+      <p:sp>
+        <p:nvSpPr>
+          <p:cNvPr id="9" name="橢圓 8">
+            <a:extLst>
+              <a:ext uri="{FF2B5EF4-FFF2-40B4-BE49-F238E27FC236}">
+                <a16:creationId xmlns:a16="http://schemas.microsoft.com/office/drawing/2014/main" id="{96104425-61E0-4D8C-B372-C365921C5486}"/>
+              </a:ext>
+            </a:extLst>
+          </p:cNvPr>
+          <p:cNvSpPr/>
+          <p:nvPr/>
+        </p:nvSpPr>
+        <p:spPr>
+          <a:xfrm>
+            <a:off x="3414817" y="4143107"/>
+            <a:ext cx="64195" cy="130629"/>
+          </a:xfrm>
+          <a:prstGeom prst="ellipse">
+            <a:avLst/>
+          </a:prstGeom>
+          <a:solidFill>
+            <a:srgbClr val="FFC000"/>
+          </a:solidFill>
+          <a:ln>
+            <a:noFill/>
+          </a:ln>
+        </p:spPr>
+        <p:style>
+          <a:lnRef idx="2">
+            <a:schemeClr val="accent1">
+              <a:shade val="50000"/>
+            </a:schemeClr>
+          </a:lnRef>
+          <a:fillRef idx="1">
+            <a:schemeClr val="accent1"/>
+          </a:fillRef>
+          <a:effectRef idx="0">
+            <a:schemeClr val="accent1"/>
+          </a:effectRef>
+          <a:fontRef idx="minor">
+            <a:schemeClr val="lt1"/>
+          </a:fontRef>
+        </p:style>
+        <p:txBody>
+          <a:bodyPr rtlCol="0" anchor="ctr"/>
+          <a:lstStyle/>
+          <a:p>
+            <a:pPr algn="ctr"/>
+            <a:endParaRPr lang="zh-TW" altLang="en-US"/>
+          </a:p>
+        </p:txBody>
+      </p:sp>
+      <p:sp>
+        <p:nvSpPr>
+          <p:cNvPr id="11" name="橢圓 10">
+            <a:extLst>
+              <a:ext uri="{FF2B5EF4-FFF2-40B4-BE49-F238E27FC236}">
+                <a16:creationId xmlns:a16="http://schemas.microsoft.com/office/drawing/2014/main" id="{7558CA32-D735-41C5-925C-165913636502}"/>
+              </a:ext>
+            </a:extLst>
+          </p:cNvPr>
+          <p:cNvSpPr/>
+          <p:nvPr/>
+        </p:nvSpPr>
+        <p:spPr>
+          <a:xfrm>
+            <a:off x="3917818" y="4124057"/>
+            <a:ext cx="64195" cy="130629"/>
+          </a:xfrm>
+          <a:prstGeom prst="ellipse">
+            <a:avLst/>
+          </a:prstGeom>
+          <a:solidFill>
+            <a:srgbClr val="ED7D31"/>
+          </a:solidFill>
+          <a:ln>
+            <a:noFill/>
+          </a:ln>
+        </p:spPr>
+        <p:style>
+          <a:lnRef idx="2">
+            <a:schemeClr val="accent1">
+              <a:shade val="50000"/>
+            </a:schemeClr>
+          </a:lnRef>
+          <a:fillRef idx="1">
+            <a:schemeClr val="accent1"/>
+          </a:fillRef>
+          <a:effectRef idx="0">
+            <a:schemeClr val="accent1"/>
+          </a:effectRef>
+          <a:fontRef idx="minor">
+            <a:schemeClr val="lt1"/>
+          </a:fontRef>
+        </p:style>
+        <p:txBody>
+          <a:bodyPr rtlCol="0" anchor="ctr"/>
+          <a:lstStyle/>
+          <a:p>
+            <a:pPr algn="ctr"/>
+            <a:endParaRPr lang="zh-TW" altLang="en-US"/>
+          </a:p>
+        </p:txBody>
+      </p:sp>
+      <p:sp>
+        <p:nvSpPr>
+          <p:cNvPr id="12" name="橢圓 11">
+            <a:extLst>
+              <a:ext uri="{FF2B5EF4-FFF2-40B4-BE49-F238E27FC236}">
+                <a16:creationId xmlns:a16="http://schemas.microsoft.com/office/drawing/2014/main" id="{12DFAB26-4C50-4D43-B300-7CBD574F3234}"/>
+              </a:ext>
+            </a:extLst>
+          </p:cNvPr>
+          <p:cNvSpPr/>
+          <p:nvPr/>
+        </p:nvSpPr>
+        <p:spPr>
+          <a:xfrm>
+            <a:off x="4421855" y="4139677"/>
+            <a:ext cx="64195" cy="130629"/>
+          </a:xfrm>
+          <a:prstGeom prst="ellipse">
+            <a:avLst/>
+          </a:prstGeom>
+          <a:solidFill>
+            <a:srgbClr val="4472C4"/>
+          </a:solidFill>
+          <a:ln>
+            <a:noFill/>
+          </a:ln>
+        </p:spPr>
+        <p:style>
+          <a:lnRef idx="2">
+            <a:schemeClr val="accent1">
+              <a:shade val="50000"/>
+            </a:schemeClr>
+          </a:lnRef>
+          <a:fillRef idx="1">
+            <a:schemeClr val="accent1"/>
+          </a:fillRef>
+          <a:effectRef idx="0">
+            <a:schemeClr val="accent1"/>
+          </a:effectRef>
+          <a:fontRef idx="minor">
+            <a:schemeClr val="lt1"/>
+          </a:fontRef>
+        </p:style>
+        <p:txBody>
+          <a:bodyPr rtlCol="0" anchor="ctr"/>
+          <a:lstStyle/>
+          <a:p>
+            <a:pPr algn="ctr"/>
+            <a:endParaRPr lang="zh-TW" altLang="en-US"/>
+          </a:p>
+        </p:txBody>
+      </p:sp>
+    </p:spTree>
+    <p:extLst>
+      <p:ext uri="{BB962C8B-B14F-4D97-AF65-F5344CB8AC3E}">
+        <p14:creationId xmlns:p14="http://schemas.microsoft.com/office/powerpoint/2010/main" val="54885415"/>
       </p:ext>
     </p:extLst>
   </p:cSld>

--- a/doc/簡報1.pptx
+++ b/doc/簡報1.pptx
@@ -262,7 +262,7 @@
           <a:p>
             <a:fld id="{B308CF68-5C24-41BE-A476-5B4696D95E06}" type="datetimeFigureOut">
               <a:rPr lang="zh-TW" altLang="en-US" smtClean="0"/>
-              <a:t>2026/5/5</a:t>
+              <a:t>2026/5/7</a:t>
             </a:fld>
             <a:endParaRPr lang="zh-TW" altLang="en-US"/>
           </a:p>
@@ -460,7 +460,7 @@
           <a:p>
             <a:fld id="{B308CF68-5C24-41BE-A476-5B4696D95E06}" type="datetimeFigureOut">
               <a:rPr lang="zh-TW" altLang="en-US" smtClean="0"/>
-              <a:t>2026/5/5</a:t>
+              <a:t>2026/5/7</a:t>
             </a:fld>
             <a:endParaRPr lang="zh-TW" altLang="en-US"/>
           </a:p>
@@ -668,7 +668,7 @@
           <a:p>
             <a:fld id="{B308CF68-5C24-41BE-A476-5B4696D95E06}" type="datetimeFigureOut">
               <a:rPr lang="zh-TW" altLang="en-US" smtClean="0"/>
-              <a:t>2026/5/5</a:t>
+              <a:t>2026/5/7</a:t>
             </a:fld>
             <a:endParaRPr lang="zh-TW" altLang="en-US"/>
           </a:p>
@@ -866,7 +866,7 @@
           <a:p>
             <a:fld id="{B308CF68-5C24-41BE-A476-5B4696D95E06}" type="datetimeFigureOut">
               <a:rPr lang="zh-TW" altLang="en-US" smtClean="0"/>
-              <a:t>2026/5/5</a:t>
+              <a:t>2026/5/7</a:t>
             </a:fld>
             <a:endParaRPr lang="zh-TW" altLang="en-US"/>
           </a:p>
@@ -1141,7 +1141,7 @@
           <a:p>
             <a:fld id="{B308CF68-5C24-41BE-A476-5B4696D95E06}" type="datetimeFigureOut">
               <a:rPr lang="zh-TW" altLang="en-US" smtClean="0"/>
-              <a:t>2026/5/5</a:t>
+              <a:t>2026/5/7</a:t>
             </a:fld>
             <a:endParaRPr lang="zh-TW" altLang="en-US"/>
           </a:p>
@@ -1406,7 +1406,7 @@
           <a:p>
             <a:fld id="{B308CF68-5C24-41BE-A476-5B4696D95E06}" type="datetimeFigureOut">
               <a:rPr lang="zh-TW" altLang="en-US" smtClean="0"/>
-              <a:t>2026/5/5</a:t>
+              <a:t>2026/5/7</a:t>
             </a:fld>
             <a:endParaRPr lang="zh-TW" altLang="en-US"/>
           </a:p>
@@ -1818,7 +1818,7 @@
           <a:p>
             <a:fld id="{B308CF68-5C24-41BE-A476-5B4696D95E06}" type="datetimeFigureOut">
               <a:rPr lang="zh-TW" altLang="en-US" smtClean="0"/>
-              <a:t>2026/5/5</a:t>
+              <a:t>2026/5/7</a:t>
             </a:fld>
             <a:endParaRPr lang="zh-TW" altLang="en-US"/>
           </a:p>
@@ -1959,7 +1959,7 @@
           <a:p>
             <a:fld id="{B308CF68-5C24-41BE-A476-5B4696D95E06}" type="datetimeFigureOut">
               <a:rPr lang="zh-TW" altLang="en-US" smtClean="0"/>
-              <a:t>2026/5/5</a:t>
+              <a:t>2026/5/7</a:t>
             </a:fld>
             <a:endParaRPr lang="zh-TW" altLang="en-US"/>
           </a:p>
@@ -2072,7 +2072,7 @@
           <a:p>
             <a:fld id="{B308CF68-5C24-41BE-A476-5B4696D95E06}" type="datetimeFigureOut">
               <a:rPr lang="zh-TW" altLang="en-US" smtClean="0"/>
-              <a:t>2026/5/5</a:t>
+              <a:t>2026/5/7</a:t>
             </a:fld>
             <a:endParaRPr lang="zh-TW" altLang="en-US"/>
           </a:p>
@@ -2383,7 +2383,7 @@
           <a:p>
             <a:fld id="{B308CF68-5C24-41BE-A476-5B4696D95E06}" type="datetimeFigureOut">
               <a:rPr lang="zh-TW" altLang="en-US" smtClean="0"/>
-              <a:t>2026/5/5</a:t>
+              <a:t>2026/5/7</a:t>
             </a:fld>
             <a:endParaRPr lang="zh-TW" altLang="en-US"/>
           </a:p>
@@ -2671,7 +2671,7 @@
           <a:p>
             <a:fld id="{B308CF68-5C24-41BE-A476-5B4696D95E06}" type="datetimeFigureOut">
               <a:rPr lang="zh-TW" altLang="en-US" smtClean="0"/>
-              <a:t>2026/5/5</a:t>
+              <a:t>2026/5/7</a:t>
             </a:fld>
             <a:endParaRPr lang="zh-TW" altLang="en-US"/>
           </a:p>
@@ -2912,7 +2912,7 @@
           <a:p>
             <a:fld id="{B308CF68-5C24-41BE-A476-5B4696D95E06}" type="datetimeFigureOut">
               <a:rPr lang="zh-TW" altLang="en-US" smtClean="0"/>
-              <a:t>2026/5/5</a:t>
+              <a:t>2026/5/7</a:t>
             </a:fld>
             <a:endParaRPr lang="zh-TW" altLang="en-US"/>
           </a:p>
@@ -7224,6 +7224,309 @@
           </a:p>
         </p:txBody>
       </p:sp>
+      <p:pic>
+        <p:nvPicPr>
+          <p:cNvPr id="17" name="圖形 16" descr="貓 以實心填滿">
+            <a:extLst>
+              <a:ext uri="{FF2B5EF4-FFF2-40B4-BE49-F238E27FC236}">
+                <a16:creationId xmlns:a16="http://schemas.microsoft.com/office/drawing/2014/main" id="{B5CAA7C0-276A-4584-BBEE-57A972026EE1}"/>
+              </a:ext>
+            </a:extLst>
+          </p:cNvPr>
+          <p:cNvPicPr>
+            <a:picLocks noChangeAspect="1"/>
+          </p:cNvPicPr>
+          <p:nvPr/>
+        </p:nvPicPr>
+        <p:blipFill>
+          <a:blip r:embed="rId12">
+            <a:extLst>
+              <a:ext uri="{28A0092B-C50C-407E-A947-70E740481C1C}">
+                <a14:useLocalDpi xmlns:a14="http://schemas.microsoft.com/office/drawing/2010/main" val="0"/>
+              </a:ext>
+              <a:ext uri="{96DAC541-7B7A-43D3-8B79-37D633B846F1}">
+                <asvg:svgBlip xmlns:asvg="http://schemas.microsoft.com/office/drawing/2016/SVG/main" r:embed="rId13"/>
+              </a:ext>
+            </a:extLst>
+          </a:blip>
+          <a:stretch>
+            <a:fillRect/>
+          </a:stretch>
+        </p:blipFill>
+        <p:spPr>
+          <a:xfrm>
+            <a:off x="1639964" y="3959636"/>
+            <a:ext cx="421218" cy="406459"/>
+          </a:xfrm>
+          <a:prstGeom prst="rect">
+            <a:avLst/>
+          </a:prstGeom>
+        </p:spPr>
+      </p:pic>
+      <p:sp>
+        <p:nvSpPr>
+          <p:cNvPr id="18" name="橢圓 17">
+            <a:extLst>
+              <a:ext uri="{FF2B5EF4-FFF2-40B4-BE49-F238E27FC236}">
+                <a16:creationId xmlns:a16="http://schemas.microsoft.com/office/drawing/2014/main" id="{85E78D9C-88BB-43FC-A9CC-7778B46F05FA}"/>
+              </a:ext>
+            </a:extLst>
+          </p:cNvPr>
+          <p:cNvSpPr/>
+          <p:nvPr/>
+        </p:nvSpPr>
+        <p:spPr>
+          <a:xfrm>
+            <a:off x="1827061" y="4143268"/>
+            <a:ext cx="64195" cy="130629"/>
+          </a:xfrm>
+          <a:prstGeom prst="ellipse">
+            <a:avLst/>
+          </a:prstGeom>
+          <a:solidFill>
+            <a:srgbClr val="00B050"/>
+          </a:solidFill>
+          <a:ln>
+            <a:noFill/>
+          </a:ln>
+        </p:spPr>
+        <p:style>
+          <a:lnRef idx="2">
+            <a:schemeClr val="accent1">
+              <a:shade val="50000"/>
+            </a:schemeClr>
+          </a:lnRef>
+          <a:fillRef idx="1">
+            <a:schemeClr val="accent1"/>
+          </a:fillRef>
+          <a:effectRef idx="0">
+            <a:schemeClr val="accent1"/>
+          </a:effectRef>
+          <a:fontRef idx="minor">
+            <a:schemeClr val="lt1"/>
+          </a:fontRef>
+        </p:style>
+        <p:txBody>
+          <a:bodyPr rtlCol="0" anchor="ctr"/>
+          <a:lstStyle/>
+          <a:p>
+            <a:pPr algn="ctr"/>
+            <a:endParaRPr lang="zh-TW" altLang="en-US"/>
+          </a:p>
+        </p:txBody>
+      </p:sp>
+      <p:pic>
+        <p:nvPicPr>
+          <p:cNvPr id="19" name="圖形 18" descr="貓 以實心填滿">
+            <a:extLst>
+              <a:ext uri="{FF2B5EF4-FFF2-40B4-BE49-F238E27FC236}">
+                <a16:creationId xmlns:a16="http://schemas.microsoft.com/office/drawing/2014/main" id="{6DA7D9EA-BB0B-4896-AA56-3E08527DF9BE}"/>
+              </a:ext>
+            </a:extLst>
+          </p:cNvPr>
+          <p:cNvPicPr>
+            <a:picLocks noChangeAspect="1"/>
+          </p:cNvPicPr>
+          <p:nvPr/>
+        </p:nvPicPr>
+        <p:blipFill>
+          <a:blip r:embed="rId14">
+            <a:extLst>
+              <a:ext uri="{28A0092B-C50C-407E-A947-70E740481C1C}">
+                <a14:useLocalDpi xmlns:a14="http://schemas.microsoft.com/office/drawing/2010/main" val="0"/>
+              </a:ext>
+              <a:ext uri="{96DAC541-7B7A-43D3-8B79-37D633B846F1}">
+                <asvg:svgBlip xmlns:asvg="http://schemas.microsoft.com/office/drawing/2016/SVG/main" r:embed="rId15"/>
+              </a:ext>
+            </a:extLst>
+          </a:blip>
+          <a:stretch>
+            <a:fillRect/>
+          </a:stretch>
+        </p:blipFill>
+        <p:spPr>
+          <a:xfrm>
+            <a:off x="1153824" y="3951309"/>
+            <a:ext cx="421218" cy="406459"/>
+          </a:xfrm>
+          <a:prstGeom prst="rect">
+            <a:avLst/>
+          </a:prstGeom>
+        </p:spPr>
+      </p:pic>
+      <p:sp>
+        <p:nvSpPr>
+          <p:cNvPr id="20" name="橢圓 19">
+            <a:extLst>
+              <a:ext uri="{FF2B5EF4-FFF2-40B4-BE49-F238E27FC236}">
+                <a16:creationId xmlns:a16="http://schemas.microsoft.com/office/drawing/2014/main" id="{1D2FB780-2A1E-4339-9B4E-246EA043E9BE}"/>
+              </a:ext>
+            </a:extLst>
+          </p:cNvPr>
+          <p:cNvSpPr/>
+          <p:nvPr/>
+        </p:nvSpPr>
+        <p:spPr>
+          <a:xfrm>
+            <a:off x="1340921" y="4134941"/>
+            <a:ext cx="64195" cy="130629"/>
+          </a:xfrm>
+          <a:prstGeom prst="ellipse">
+            <a:avLst/>
+          </a:prstGeom>
+          <a:solidFill>
+            <a:srgbClr val="E4BBF1"/>
+          </a:solidFill>
+          <a:ln>
+            <a:noFill/>
+          </a:ln>
+        </p:spPr>
+        <p:style>
+          <a:lnRef idx="2">
+            <a:schemeClr val="accent1">
+              <a:shade val="50000"/>
+            </a:schemeClr>
+          </a:lnRef>
+          <a:fillRef idx="1">
+            <a:schemeClr val="accent1"/>
+          </a:fillRef>
+          <a:effectRef idx="0">
+            <a:schemeClr val="accent1"/>
+          </a:effectRef>
+          <a:fontRef idx="minor">
+            <a:schemeClr val="lt1"/>
+          </a:fontRef>
+        </p:style>
+        <p:txBody>
+          <a:bodyPr rtlCol="0" anchor="ctr"/>
+          <a:lstStyle/>
+          <a:p>
+            <a:pPr algn="ctr"/>
+            <a:endParaRPr lang="zh-TW" altLang="en-US"/>
+          </a:p>
+        </p:txBody>
+      </p:sp>
+      <p:pic>
+        <p:nvPicPr>
+          <p:cNvPr id="21" name="圖片 20">
+            <a:extLst>
+              <a:ext uri="{FF2B5EF4-FFF2-40B4-BE49-F238E27FC236}">
+                <a16:creationId xmlns:a16="http://schemas.microsoft.com/office/drawing/2014/main" id="{D464E1A6-E2A2-44F6-9486-971C9F454A4B}"/>
+              </a:ext>
+            </a:extLst>
+          </p:cNvPr>
+          <p:cNvPicPr>
+            <a:picLocks noChangeAspect="1"/>
+          </p:cNvPicPr>
+          <p:nvPr/>
+        </p:nvPicPr>
+        <p:blipFill>
+          <a:blip r:embed="rId16"/>
+          <a:stretch>
+            <a:fillRect/>
+          </a:stretch>
+        </p:blipFill>
+        <p:spPr>
+          <a:xfrm>
+            <a:off x="1055315" y="3232384"/>
+            <a:ext cx="1169298" cy="627109"/>
+          </a:xfrm>
+          <a:prstGeom prst="rect">
+            <a:avLst/>
+          </a:prstGeom>
+        </p:spPr>
+      </p:pic>
+      <p:pic>
+        <p:nvPicPr>
+          <p:cNvPr id="23" name="圖形 22" descr="貓 以實心填滿">
+            <a:extLst>
+              <a:ext uri="{FF2B5EF4-FFF2-40B4-BE49-F238E27FC236}">
+                <a16:creationId xmlns:a16="http://schemas.microsoft.com/office/drawing/2014/main" id="{A3F7D855-B942-48D9-A2D8-72F8BA2535FB}"/>
+              </a:ext>
+            </a:extLst>
+          </p:cNvPr>
+          <p:cNvPicPr>
+            <a:picLocks noChangeAspect="1"/>
+          </p:cNvPicPr>
+          <p:nvPr/>
+        </p:nvPicPr>
+        <p:blipFill>
+          <a:blip r:embed="rId17">
+            <a:extLst>
+              <a:ext uri="{28A0092B-C50C-407E-A947-70E740481C1C}">
+                <a14:useLocalDpi xmlns:a14="http://schemas.microsoft.com/office/drawing/2010/main" val="0"/>
+              </a:ext>
+              <a:ext uri="{96DAC541-7B7A-43D3-8B79-37D633B846F1}">
+                <asvg:svgBlip xmlns:asvg="http://schemas.microsoft.com/office/drawing/2016/SVG/main" r:embed="rId18"/>
+              </a:ext>
+            </a:extLst>
+          </a:blip>
+          <a:stretch>
+            <a:fillRect/>
+          </a:stretch>
+        </p:blipFill>
+        <p:spPr>
+          <a:xfrm>
+            <a:off x="4708940" y="3939877"/>
+            <a:ext cx="421218" cy="406459"/>
+          </a:xfrm>
+          <a:prstGeom prst="rect">
+            <a:avLst/>
+          </a:prstGeom>
+        </p:spPr>
+      </p:pic>
+      <p:sp>
+        <p:nvSpPr>
+          <p:cNvPr id="24" name="橢圓 23">
+            <a:extLst>
+              <a:ext uri="{FF2B5EF4-FFF2-40B4-BE49-F238E27FC236}">
+                <a16:creationId xmlns:a16="http://schemas.microsoft.com/office/drawing/2014/main" id="{90380919-34AF-4480-8543-CF0AB11B551D}"/>
+              </a:ext>
+            </a:extLst>
+          </p:cNvPr>
+          <p:cNvSpPr/>
+          <p:nvPr/>
+        </p:nvSpPr>
+        <p:spPr>
+          <a:xfrm>
+            <a:off x="4897638" y="4123348"/>
+            <a:ext cx="64195" cy="130629"/>
+          </a:xfrm>
+          <a:prstGeom prst="ellipse">
+            <a:avLst/>
+          </a:prstGeom>
+          <a:solidFill>
+            <a:srgbClr val="FED5B0"/>
+          </a:solidFill>
+          <a:ln>
+            <a:noFill/>
+          </a:ln>
+        </p:spPr>
+        <p:style>
+          <a:lnRef idx="2">
+            <a:schemeClr val="accent1">
+              <a:shade val="50000"/>
+            </a:schemeClr>
+          </a:lnRef>
+          <a:fillRef idx="1">
+            <a:schemeClr val="accent1"/>
+          </a:fillRef>
+          <a:effectRef idx="0">
+            <a:schemeClr val="accent1"/>
+          </a:effectRef>
+          <a:fontRef idx="minor">
+            <a:schemeClr val="lt1"/>
+          </a:fontRef>
+        </p:style>
+        <p:txBody>
+          <a:bodyPr rtlCol="0" anchor="ctr"/>
+          <a:lstStyle/>
+          <a:p>
+            <a:pPr algn="ctr"/>
+            <a:endParaRPr lang="zh-TW" altLang="en-US"/>
+          </a:p>
+        </p:txBody>
+      </p:sp>
     </p:spTree>
     <p:extLst>
       <p:ext uri="{BB962C8B-B14F-4D97-AF65-F5344CB8AC3E}">
